--- a/2026-B/ingenieria-desarrollo-movil/unidad-02/slides/unidad02presentacion-datos.pptx
+++ b/2026-B/ingenieria-desarrollo-movil/unidad-02/slides/unidad02presentacion-datos.pptx
@@ -567,7 +567,7 @@
           <a:lstStyle/>
           <a:p>
             <a:r>
-              <a:t>EN VIVO (min 0-3). Abrir con la pregunta y pedir que piensen en la pantalla más grande de su proyecto ABP o de la app de su trabajo. Contar en voz alta cuántas de las tres cosas viven hoy en el mismo archivo: casi siempre las tres. Idea que se instala desde el primer minuto: esta unidad separa lo que se ve, lo que la pantalla recuerda y lo que viaja por la red, para que cada cosa viva en su capa, se pruebe sin el dispositivo y se pueda defender en un ADR. Esa frase es la columna vertebral de toda la unidad y del H2.</a:t>
+              <a:t>EN VIVO (min 0-3). Abrir con la pregunta y pedir que piensen en la pantalla más grande de su proyecto de aula o de la app de su trabajo. Contar en voz alta cuántas de las tres cosas viven hoy en el mismo archivo: casi siempre las tres. Idea que se instala desde el primer minuto: esta unidad separa lo que se ve, lo que la pantalla recuerda y lo que viaja por la red, para que cada cosa viva en su capa, se pruebe sin el dispositivo y se pueda defender en un ADR. Esa frase es la columna vertebral de toda la unidad y del H2.</a:t>
             </a:r>
           </a:p>
         </p:txBody>
@@ -2107,7 +2107,7 @@
           <a:lstStyle/>
           <a:p>
             <a:r>
-              <a:t>EN VIVO (min 4-6). El encuentro sincrónico 2 es el viernes 16 de octubre de 2026, de 6:00 a 7:00 p. m., por Google Meet: https://meet.google.com/pzh-kxer-pnx. La Unidad 2 va del 12 al 18 de octubre. Este encuentro incluye la clínica del H1 (Actividad de aprendizaje 1, vence el domingo 18): que traigan dudas concretas de arquitectura y backlog. El H2 es la Actividad de aprendizaje 2, vale 20 % y es individual: publicar en el foro de la Unidad 2 el análisis (ADR del stack más las secciones 02 Código y UI y 03 API y datos del marco de gobierno móvil del curso), responder a DOS compañeros y subir a la tarea un PDF con la publicación y los enlaces a las respuestas. Vence el domingo 25 de octubre a las 11:59 p. m. El detalle y la rúbrica están en la Guía del proyecto ABP, dentro de la OVA del curso.</a:t>
+              <a:t>EN VIVO (min 4-6). El encuentro sincrónico 2 es el viernes 16 de octubre de 2026, de 6:00 a 7:00 p. m., por Google Meet: https://meet.google.com/pzh-kxer-pnx. La Unidad 2 va del 12 al 18 de octubre. Este encuentro incluye la clínica del H1 (Actividad de aprendizaje 1, vence el domingo 18): que traigan dudas concretas de arquitectura y backlog. El H2 es la Actividad de aprendizaje 2, vale 20 % y es individual: publicar en el foro de la Unidad 2 el análisis (ADR del stack más las secciones 02 Código y UI y 03 API y datos del marco de gobierno móvil del curso), responder a DOS compañeros y subir a la tarea un PDF con la publicación y los enlaces a las respuestas. Vence el domingo 25 de octubre a las 11:59 p. m. El detalle y la rúbrica están en la Guía del proyecto de aula, dentro de la OVA del curso.</a:t>
             </a:r>
           </a:p>
         </p:txBody>
@@ -2807,7 +2807,7 @@
           <a:lstStyle/>
           <a:p>
             <a:r>
-              <a:t>CONSULTA. La sección 03 del marco agrega lo que en móvil separa una app segura de una que no lo es: DÓNDE se guarda el token, QUIÉN lo adjunta y QUÉ pasa cuando vence. El almacenamiento seguro se usa a través de un puerto (AlmacenSeguro, en core/auth/) implementado con un plugin de Capacitor: es uno de los «plugins como adaptadores» del ABP que se estudian en la Unidad 3. Al arrancar, provideAppInitializer intenta un refresh si hay refresh token guardado, y la sesión sobrevive al cierre de la app. Preferences guarda en SharedPreferences o UserDefaults SIN cifrar: un token ahí es un token expuesto. Lectura complementaria: OWASP (2024), MASVS.</a:t>
+              <a:t>CONSULTA. La sección 03 del marco agrega lo que en móvil separa una app segura de una que no lo es: DÓNDE se guarda el token, QUIÉN lo adjunta y QUÉ pasa cuando vence. El almacenamiento seguro se usa a través de un puerto (AlmacenSeguro, en core/auth/) implementado con un plugin de Capacitor: es uno de los «plugins como adaptadores» del proyecto de aula que se estudian en la Unidad 3. Al arrancar, provideAppInitializer intenta un refresh si hay refresh token guardado, y la sesión sobrevive al cierre de la app. Preferences guarda en SharedPreferences o UserDefaults SIN cifrar: un token ahí es un token expuesto. Lectura complementaria: OWASP (2024), MASVS.</a:t>
             </a:r>
           </a:p>
         </p:txBody>
@@ -3157,7 +3157,7 @@
           <a:lstStyle/>
           <a:p>
             <a:r>
-              <a:t>EN VIVO (min 41-44). En campo, la señal es la excepción: piense en un técnico haciendo una visita en una finca cafetera de la zona rural de Pitalito. La sección 03 del marco exige decidir la estrategia POR FEATURE y documentarla; el ABP pide como mínimo una caché de lectura aplicada. Si una feature se declara offline primero, el marco exige las cuatro cosas de las tarjetas: mutaciones encoladas con un id generado en el cliente; sincronización idempotente (cabecera Idempotency-Key); una política de conflictos por entidad; y la conectividad como flujo, no como consulta única. Al reconectar, la cola se envía con concatMap (en orden, una por una) y cada envío lleva su clave: si la respuesta se perdió y se reenvía, el servidor no duplica. El título es la advertencia de la OVA: una estrategia dice QUÉ se lee sin red, QUÉ se escribe sin red, CÓMO se resuelven los conflictos y QUÉ ve el usuario en cada caso. Sin esas cuatro respuestas, el requisito no está documentado.</a:t>
+              <a:t>EN VIVO (min 41-44). En campo, la señal es la excepción: piense en un técnico haciendo una visita en una finca cafetera de la zona rural de Pitalito. La sección 03 del marco exige decidir la estrategia POR FEATURE y documentarla; el proyecto de aula pide como mínimo una caché de lectura aplicada. Si una feature se declara offline primero, el marco exige las cuatro cosas de las tarjetas: mutaciones encoladas con un id generado en el cliente; sincronización idempotente (cabecera Idempotency-Key); una política de conflictos por entidad; y la conectividad como flujo, no como consulta única. Al reconectar, la cola se envía con concatMap (en orden, una por una) y cada envío lleva su clave: si la respuesta se perdió y se reenvía, el servidor no duplica. El título es la advertencia de la OVA: una estrategia dice QUÉ se lee sin red, QUÉ se escribe sin red, CÓMO se resuelven los conflictos y QUÉ ve el usuario en cada caso. Sin esas cuatro respuestas, el requisito no está documentado.</a:t>
             </a:r>
           </a:p>
         </p:txBody>
@@ -3437,7 +3437,7 @@
           <a:lstStyle/>
           <a:p>
             <a:r>
-              <a:t>CONSULTA (se señala en vivo al cerrar). Mapa del enunciado de la A2 contra la OVA y el marco de gobierno móvil del curso: cada fila es un párrafo del análisis que se publica en el foro. Las plantillas en español (ADR, feature, pantalla, integración de endpoint, entidad local) están en Plantillas del proyecto, y el detalle del hito en la Guía del proyecto ABP, ambas dentro de la OVA del curso.</a:t>
+              <a:t>CONSULTA (se señala en vivo al cerrar). Mapa del enunciado de la A2 contra la OVA y el marco de gobierno móvil del curso: cada fila es un párrafo del análisis que se publica en el foro. Las plantillas en español (ADR, feature, pantalla, integración de endpoint, entidad local) están en Plantillas del proyecto, y el detalle del hito en la Guía del proyecto de aula, ambas dentro de la OVA del curso.</a:t>
             </a:r>
           </a:p>
         </p:txBody>
@@ -3577,7 +3577,7 @@
           <a:lstStyle/>
           <a:p>
             <a:r>
-              <a:t>EN VIVO (min 6-9). Todos los ejemplos de la unidad (y de los manuales) usan la misma app de referencia, Bitácora de Campo, que registra visitas técnicas con formulario, foto y ubicación; no es elegible como proyecto ABP. Su feature central, visitas, está organizada por capas como pide la sección 01 del marco: presentación conoce Ionic y Angular; dominio es TypeScript puro y no importa nada de infraestructura; datos implementa los contratos que declara el dominio. Las flechas son de dependencia: presentación y datos apuntan al dominio, el dominio no apunta a nadie. Decisión que conviene dejar escrita: en los ejemplos el dominio usa Observable como tipo de asincronía porque RxJS es una librería de flujos, no de infraestructura. Usar Promise en el dominio también es defendible; lo importante es decidirlo UNA vez y registrarlo en un ADR. Preguntar: ¿en su proyecto quién decidió eso?</a:t>
+              <a:t>EN VIVO (min 6-9). Todos los ejemplos de la unidad (y de los manuales) usan la misma app de referencia, Bitácora de Campo, que registra visitas técnicas con formulario, foto y ubicación; no es elegible como proyecto de aula. Su feature central, visitas, está organizada por capas como pide la sección 01 del marco: presentación conoce Ionic y Angular; dominio es TypeScript puro y no importa nada de infraestructura; datos implementa los contratos que declara el dominio. Las flechas son de dependencia: presentación y datos apuntan al dominio, el dominio no apunta a nadie. Decisión que conviene dejar escrita: en los ejemplos el dominio usa Observable como tipo de asincronía porque RxJS es una librería de flujos, no de infraestructura. Usar Promise en el dominio también es defendible; lo importante es decidirlo UNA vez y registrarlo en un ADR. Preguntar: ¿en su proyecto quién decidió eso?</a:t>
             </a:r>
           </a:p>
         </p:txBody>
@@ -45175,7 +45175,7 @@
                           </a:solidFill>
                           <a:latin typeface="Aptos"/>
                         </a:rPr>
-                        <a:t>Lista y detalle (mínimo del ABP)</a:t>
+                        <a:t>Lista y detalle (mínimo del proyecto de aula)</a:t>
                       </a:r>
                     </a:p>
                   </a:txBody>
